--- a/陪我走過春夏秋冬_粵語.pptx
+++ b/陪我走過春夏秋冬_粵語.pptx
@@ -112,6 +112,11 @@
       </a:defRPr>
     </a:lvl9pPr>
   </p:defaultTextStyle>
+  <p:extLst>
+    <p:ext uri="{EFAFB233-063F-42B5-8137-9DF3F51BA10A}">
+      <p15:sldGuideLst xmlns:p15="http://schemas.microsoft.com/office/powerpoint/2012/main"/>
+    </p:ext>
+  </p:extLst>
 </p:presentation>
 </file>
 
@@ -153,7 +158,7 @@
           <a:lstStyle/>
           <a:p>
             <a:r>
-              <a:rPr lang="en-US" altLang="zh-TW" smtClean="0"/>
+              <a:rPr lang="en-US" altLang="zh-TW"/>
               <a:t>Click to edit Master title style</a:t>
             </a:r>
             <a:endParaRPr lang="zh-TW" altLang="en-US"/>
@@ -272,7 +277,7 @@
           </a:lstStyle>
           <a:p>
             <a:r>
-              <a:rPr lang="en-US" altLang="zh-TW" smtClean="0"/>
+              <a:rPr lang="en-US" altLang="zh-TW"/>
               <a:t>Click to edit Master subtitle style</a:t>
             </a:r>
             <a:endParaRPr lang="zh-TW" altLang="en-US"/>
@@ -296,7 +301,7 @@
           <a:p>
             <a:fld id="{3A5FA674-15FC-4E67-BCEB-E4B9CC40C07A}" type="datetimeFigureOut">
               <a:rPr lang="vi-VN" smtClean="0"/>
-              <a:t>19/11/2022</a:t>
+              <a:t>14/09/2024</a:t>
             </a:fld>
             <a:endParaRPr lang="vi-VN"/>
           </a:p>
@@ -390,7 +395,7 @@
           <a:lstStyle/>
           <a:p>
             <a:r>
-              <a:rPr lang="en-US" altLang="zh-TW" smtClean="0"/>
+              <a:rPr lang="en-US" altLang="zh-TW"/>
               <a:t>Click to edit Master title style</a:t>
             </a:r>
             <a:endParaRPr lang="zh-TW" altLang="en-US"/>
@@ -414,35 +419,35 @@
           <a:p>
             <a:pPr lvl="0"/>
             <a:r>
-              <a:rPr lang="en-US" altLang="zh-TW" smtClean="0"/>
+              <a:rPr lang="en-US" altLang="zh-TW"/>
               <a:t>Edit Master text styles</a:t>
             </a:r>
           </a:p>
           <a:p>
             <a:pPr lvl="1"/>
             <a:r>
-              <a:rPr lang="en-US" altLang="zh-TW" smtClean="0"/>
+              <a:rPr lang="en-US" altLang="zh-TW"/>
               <a:t>Second level</a:t>
             </a:r>
           </a:p>
           <a:p>
             <a:pPr lvl="2"/>
             <a:r>
-              <a:rPr lang="en-US" altLang="zh-TW" smtClean="0"/>
+              <a:rPr lang="en-US" altLang="zh-TW"/>
               <a:t>Third level</a:t>
             </a:r>
           </a:p>
           <a:p>
             <a:pPr lvl="3"/>
             <a:r>
-              <a:rPr lang="en-US" altLang="zh-TW" smtClean="0"/>
+              <a:rPr lang="en-US" altLang="zh-TW"/>
               <a:t>Fourth level</a:t>
             </a:r>
           </a:p>
           <a:p>
             <a:pPr lvl="4"/>
             <a:r>
-              <a:rPr lang="en-US" altLang="zh-TW" smtClean="0"/>
+              <a:rPr lang="en-US" altLang="zh-TW"/>
               <a:t>Fifth level</a:t>
             </a:r>
             <a:endParaRPr lang="zh-TW" altLang="en-US"/>
@@ -466,7 +471,7 @@
           <a:p>
             <a:fld id="{3A5FA674-15FC-4E67-BCEB-E4B9CC40C07A}" type="datetimeFigureOut">
               <a:rPr lang="vi-VN" smtClean="0"/>
-              <a:t>19/11/2022</a:t>
+              <a:t>14/09/2024</a:t>
             </a:fld>
             <a:endParaRPr lang="vi-VN"/>
           </a:p>
@@ -565,7 +570,7 @@
           <a:lstStyle/>
           <a:p>
             <a:r>
-              <a:rPr lang="en-US" altLang="zh-TW" smtClean="0"/>
+              <a:rPr lang="en-US" altLang="zh-TW"/>
               <a:t>Click to edit Master title style</a:t>
             </a:r>
             <a:endParaRPr lang="zh-TW" altLang="en-US"/>
@@ -594,35 +599,35 @@
           <a:p>
             <a:pPr lvl="0"/>
             <a:r>
-              <a:rPr lang="en-US" altLang="zh-TW" smtClean="0"/>
+              <a:rPr lang="en-US" altLang="zh-TW"/>
               <a:t>Edit Master text styles</a:t>
             </a:r>
           </a:p>
           <a:p>
             <a:pPr lvl="1"/>
             <a:r>
-              <a:rPr lang="en-US" altLang="zh-TW" smtClean="0"/>
+              <a:rPr lang="en-US" altLang="zh-TW"/>
               <a:t>Second level</a:t>
             </a:r>
           </a:p>
           <a:p>
             <a:pPr lvl="2"/>
             <a:r>
-              <a:rPr lang="en-US" altLang="zh-TW" smtClean="0"/>
+              <a:rPr lang="en-US" altLang="zh-TW"/>
               <a:t>Third level</a:t>
             </a:r>
           </a:p>
           <a:p>
             <a:pPr lvl="3"/>
             <a:r>
-              <a:rPr lang="en-US" altLang="zh-TW" smtClean="0"/>
+              <a:rPr lang="en-US" altLang="zh-TW"/>
               <a:t>Fourth level</a:t>
             </a:r>
           </a:p>
           <a:p>
             <a:pPr lvl="4"/>
             <a:r>
-              <a:rPr lang="en-US" altLang="zh-TW" smtClean="0"/>
+              <a:rPr lang="en-US" altLang="zh-TW"/>
               <a:t>Fifth level</a:t>
             </a:r>
             <a:endParaRPr lang="zh-TW" altLang="en-US"/>
@@ -646,7 +651,7 @@
           <a:p>
             <a:fld id="{3A5FA674-15FC-4E67-BCEB-E4B9CC40C07A}" type="datetimeFigureOut">
               <a:rPr lang="vi-VN" smtClean="0"/>
-              <a:t>19/11/2022</a:t>
+              <a:t>14/09/2024</a:t>
             </a:fld>
             <a:endParaRPr lang="vi-VN"/>
           </a:p>
@@ -740,7 +745,7 @@
           <a:lstStyle/>
           <a:p>
             <a:r>
-              <a:rPr lang="en-US" altLang="zh-TW" smtClean="0"/>
+              <a:rPr lang="en-US" altLang="zh-TW"/>
               <a:t>Click to edit Master title style</a:t>
             </a:r>
             <a:endParaRPr lang="zh-TW" altLang="en-US"/>
@@ -764,35 +769,35 @@
           <a:p>
             <a:pPr lvl="0"/>
             <a:r>
-              <a:rPr lang="en-US" altLang="zh-TW" smtClean="0"/>
+              <a:rPr lang="en-US" altLang="zh-TW"/>
               <a:t>Edit Master text styles</a:t>
             </a:r>
           </a:p>
           <a:p>
             <a:pPr lvl="1"/>
             <a:r>
-              <a:rPr lang="en-US" altLang="zh-TW" smtClean="0"/>
+              <a:rPr lang="en-US" altLang="zh-TW"/>
               <a:t>Second level</a:t>
             </a:r>
           </a:p>
           <a:p>
             <a:pPr lvl="2"/>
             <a:r>
-              <a:rPr lang="en-US" altLang="zh-TW" smtClean="0"/>
+              <a:rPr lang="en-US" altLang="zh-TW"/>
               <a:t>Third level</a:t>
             </a:r>
           </a:p>
           <a:p>
             <a:pPr lvl="3"/>
             <a:r>
-              <a:rPr lang="en-US" altLang="zh-TW" smtClean="0"/>
+              <a:rPr lang="en-US" altLang="zh-TW"/>
               <a:t>Fourth level</a:t>
             </a:r>
           </a:p>
           <a:p>
             <a:pPr lvl="4"/>
             <a:r>
-              <a:rPr lang="en-US" altLang="zh-TW" smtClean="0"/>
+              <a:rPr lang="en-US" altLang="zh-TW"/>
               <a:t>Fifth level</a:t>
             </a:r>
             <a:endParaRPr lang="zh-TW" altLang="en-US"/>
@@ -816,7 +821,7 @@
           <a:p>
             <a:fld id="{3A5FA674-15FC-4E67-BCEB-E4B9CC40C07A}" type="datetimeFigureOut">
               <a:rPr lang="vi-VN" smtClean="0"/>
-              <a:t>19/11/2022</a:t>
+              <a:t>14/09/2024</a:t>
             </a:fld>
             <a:endParaRPr lang="vi-VN"/>
           </a:p>
@@ -919,7 +924,7 @@
           </a:lstStyle>
           <a:p>
             <a:r>
-              <a:rPr lang="en-US" altLang="zh-TW" smtClean="0"/>
+              <a:rPr lang="en-US" altLang="zh-TW"/>
               <a:t>Click to edit Master title style</a:t>
             </a:r>
             <a:endParaRPr lang="zh-TW" altLang="en-US"/>
@@ -1039,7 +1044,7 @@
           <a:p>
             <a:pPr lvl="0"/>
             <a:r>
-              <a:rPr lang="en-US" altLang="zh-TW" smtClean="0"/>
+              <a:rPr lang="en-US" altLang="zh-TW"/>
               <a:t>Edit Master text styles</a:t>
             </a:r>
           </a:p>
@@ -1062,7 +1067,7 @@
           <a:p>
             <a:fld id="{3A5FA674-15FC-4E67-BCEB-E4B9CC40C07A}" type="datetimeFigureOut">
               <a:rPr lang="vi-VN" smtClean="0"/>
-              <a:t>19/11/2022</a:t>
+              <a:t>14/09/2024</a:t>
             </a:fld>
             <a:endParaRPr lang="vi-VN"/>
           </a:p>
@@ -1156,7 +1161,7 @@
           <a:lstStyle/>
           <a:p>
             <a:r>
-              <a:rPr lang="en-US" altLang="zh-TW" smtClean="0"/>
+              <a:rPr lang="en-US" altLang="zh-TW"/>
               <a:t>Click to edit Master title style</a:t>
             </a:r>
             <a:endParaRPr lang="zh-TW" altLang="en-US"/>
@@ -1213,35 +1218,35 @@
           <a:p>
             <a:pPr lvl="0"/>
             <a:r>
-              <a:rPr lang="en-US" altLang="zh-TW" smtClean="0"/>
+              <a:rPr lang="en-US" altLang="zh-TW"/>
               <a:t>Edit Master text styles</a:t>
             </a:r>
           </a:p>
           <a:p>
             <a:pPr lvl="1"/>
             <a:r>
-              <a:rPr lang="en-US" altLang="zh-TW" smtClean="0"/>
+              <a:rPr lang="en-US" altLang="zh-TW"/>
               <a:t>Second level</a:t>
             </a:r>
           </a:p>
           <a:p>
             <a:pPr lvl="2"/>
             <a:r>
-              <a:rPr lang="en-US" altLang="zh-TW" smtClean="0"/>
+              <a:rPr lang="en-US" altLang="zh-TW"/>
               <a:t>Third level</a:t>
             </a:r>
           </a:p>
           <a:p>
             <a:pPr lvl="3"/>
             <a:r>
-              <a:rPr lang="en-US" altLang="zh-TW" smtClean="0"/>
+              <a:rPr lang="en-US" altLang="zh-TW"/>
               <a:t>Fourth level</a:t>
             </a:r>
           </a:p>
           <a:p>
             <a:pPr lvl="4"/>
             <a:r>
-              <a:rPr lang="en-US" altLang="zh-TW" smtClean="0"/>
+              <a:rPr lang="en-US" altLang="zh-TW"/>
               <a:t>Fifth level</a:t>
             </a:r>
             <a:endParaRPr lang="zh-TW" altLang="en-US"/>
@@ -1298,35 +1303,35 @@
           <a:p>
             <a:pPr lvl="0"/>
             <a:r>
-              <a:rPr lang="en-US" altLang="zh-TW" smtClean="0"/>
+              <a:rPr lang="en-US" altLang="zh-TW"/>
               <a:t>Edit Master text styles</a:t>
             </a:r>
           </a:p>
           <a:p>
             <a:pPr lvl="1"/>
             <a:r>
-              <a:rPr lang="en-US" altLang="zh-TW" smtClean="0"/>
+              <a:rPr lang="en-US" altLang="zh-TW"/>
               <a:t>Second level</a:t>
             </a:r>
           </a:p>
           <a:p>
             <a:pPr lvl="2"/>
             <a:r>
-              <a:rPr lang="en-US" altLang="zh-TW" smtClean="0"/>
+              <a:rPr lang="en-US" altLang="zh-TW"/>
               <a:t>Third level</a:t>
             </a:r>
           </a:p>
           <a:p>
             <a:pPr lvl="3"/>
             <a:r>
-              <a:rPr lang="en-US" altLang="zh-TW" smtClean="0"/>
+              <a:rPr lang="en-US" altLang="zh-TW"/>
               <a:t>Fourth level</a:t>
             </a:r>
           </a:p>
           <a:p>
             <a:pPr lvl="4"/>
             <a:r>
-              <a:rPr lang="en-US" altLang="zh-TW" smtClean="0"/>
+              <a:rPr lang="en-US" altLang="zh-TW"/>
               <a:t>Fifth level</a:t>
             </a:r>
             <a:endParaRPr lang="zh-TW" altLang="en-US"/>
@@ -1350,7 +1355,7 @@
           <a:p>
             <a:fld id="{3A5FA674-15FC-4E67-BCEB-E4B9CC40C07A}" type="datetimeFigureOut">
               <a:rPr lang="vi-VN" smtClean="0"/>
-              <a:t>19/11/2022</a:t>
+              <a:t>14/09/2024</a:t>
             </a:fld>
             <a:endParaRPr lang="vi-VN"/>
           </a:p>
@@ -1448,7 +1453,7 @@
           </a:lstStyle>
           <a:p>
             <a:r>
-              <a:rPr lang="en-US" altLang="zh-TW" smtClean="0"/>
+              <a:rPr lang="en-US" altLang="zh-TW"/>
               <a:t>Click to edit Master title style</a:t>
             </a:r>
             <a:endParaRPr lang="zh-TW" altLang="en-US"/>
@@ -1514,7 +1519,7 @@
           <a:p>
             <a:pPr lvl="0"/>
             <a:r>
-              <a:rPr lang="en-US" altLang="zh-TW" smtClean="0"/>
+              <a:rPr lang="en-US" altLang="zh-TW"/>
               <a:t>Edit Master text styles</a:t>
             </a:r>
           </a:p>
@@ -1570,35 +1575,35 @@
           <a:p>
             <a:pPr lvl="0"/>
             <a:r>
-              <a:rPr lang="en-US" altLang="zh-TW" smtClean="0"/>
+              <a:rPr lang="en-US" altLang="zh-TW"/>
               <a:t>Edit Master text styles</a:t>
             </a:r>
           </a:p>
           <a:p>
             <a:pPr lvl="1"/>
             <a:r>
-              <a:rPr lang="en-US" altLang="zh-TW" smtClean="0"/>
+              <a:rPr lang="en-US" altLang="zh-TW"/>
               <a:t>Second level</a:t>
             </a:r>
           </a:p>
           <a:p>
             <a:pPr lvl="2"/>
             <a:r>
-              <a:rPr lang="en-US" altLang="zh-TW" smtClean="0"/>
+              <a:rPr lang="en-US" altLang="zh-TW"/>
               <a:t>Third level</a:t>
             </a:r>
           </a:p>
           <a:p>
             <a:pPr lvl="3"/>
             <a:r>
-              <a:rPr lang="en-US" altLang="zh-TW" smtClean="0"/>
+              <a:rPr lang="en-US" altLang="zh-TW"/>
               <a:t>Fourth level</a:t>
             </a:r>
           </a:p>
           <a:p>
             <a:pPr lvl="4"/>
             <a:r>
-              <a:rPr lang="en-US" altLang="zh-TW" smtClean="0"/>
+              <a:rPr lang="en-US" altLang="zh-TW"/>
               <a:t>Fifth level</a:t>
             </a:r>
             <a:endParaRPr lang="zh-TW" altLang="en-US"/>
@@ -1664,7 +1669,7 @@
           <a:p>
             <a:pPr lvl="0"/>
             <a:r>
-              <a:rPr lang="en-US" altLang="zh-TW" smtClean="0"/>
+              <a:rPr lang="en-US" altLang="zh-TW"/>
               <a:t>Edit Master text styles</a:t>
             </a:r>
           </a:p>
@@ -1720,35 +1725,35 @@
           <a:p>
             <a:pPr lvl="0"/>
             <a:r>
-              <a:rPr lang="en-US" altLang="zh-TW" smtClean="0"/>
+              <a:rPr lang="en-US" altLang="zh-TW"/>
               <a:t>Edit Master text styles</a:t>
             </a:r>
           </a:p>
           <a:p>
             <a:pPr lvl="1"/>
             <a:r>
-              <a:rPr lang="en-US" altLang="zh-TW" smtClean="0"/>
+              <a:rPr lang="en-US" altLang="zh-TW"/>
               <a:t>Second level</a:t>
             </a:r>
           </a:p>
           <a:p>
             <a:pPr lvl="2"/>
             <a:r>
-              <a:rPr lang="en-US" altLang="zh-TW" smtClean="0"/>
+              <a:rPr lang="en-US" altLang="zh-TW"/>
               <a:t>Third level</a:t>
             </a:r>
           </a:p>
           <a:p>
             <a:pPr lvl="3"/>
             <a:r>
-              <a:rPr lang="en-US" altLang="zh-TW" smtClean="0"/>
+              <a:rPr lang="en-US" altLang="zh-TW"/>
               <a:t>Fourth level</a:t>
             </a:r>
           </a:p>
           <a:p>
             <a:pPr lvl="4"/>
             <a:r>
-              <a:rPr lang="en-US" altLang="zh-TW" smtClean="0"/>
+              <a:rPr lang="en-US" altLang="zh-TW"/>
               <a:t>Fifth level</a:t>
             </a:r>
             <a:endParaRPr lang="zh-TW" altLang="en-US"/>
@@ -1772,7 +1777,7 @@
           <a:p>
             <a:fld id="{3A5FA674-15FC-4E67-BCEB-E4B9CC40C07A}" type="datetimeFigureOut">
               <a:rPr lang="vi-VN" smtClean="0"/>
-              <a:t>19/11/2022</a:t>
+              <a:t>14/09/2024</a:t>
             </a:fld>
             <a:endParaRPr lang="vi-VN"/>
           </a:p>
@@ -1866,7 +1871,7 @@
           <a:lstStyle/>
           <a:p>
             <a:r>
-              <a:rPr lang="en-US" altLang="zh-TW" smtClean="0"/>
+              <a:rPr lang="en-US" altLang="zh-TW"/>
               <a:t>Click to edit Master title style</a:t>
             </a:r>
             <a:endParaRPr lang="zh-TW" altLang="en-US"/>
@@ -1890,7 +1895,7 @@
           <a:p>
             <a:fld id="{3A5FA674-15FC-4E67-BCEB-E4B9CC40C07A}" type="datetimeFigureOut">
               <a:rPr lang="vi-VN" smtClean="0"/>
-              <a:t>19/11/2022</a:t>
+              <a:t>14/09/2024</a:t>
             </a:fld>
             <a:endParaRPr lang="vi-VN"/>
           </a:p>
@@ -1985,7 +1990,7 @@
           <a:p>
             <a:fld id="{3A5FA674-15FC-4E67-BCEB-E4B9CC40C07A}" type="datetimeFigureOut">
               <a:rPr lang="vi-VN" smtClean="0"/>
-              <a:t>19/11/2022</a:t>
+              <a:t>14/09/2024</a:t>
             </a:fld>
             <a:endParaRPr lang="vi-VN"/>
           </a:p>
@@ -2088,7 +2093,7 @@
           </a:lstStyle>
           <a:p>
             <a:r>
-              <a:rPr lang="en-US" altLang="zh-TW" smtClean="0"/>
+              <a:rPr lang="en-US" altLang="zh-TW"/>
               <a:t>Click to edit Master title style</a:t>
             </a:r>
             <a:endParaRPr lang="zh-TW" altLang="en-US"/>
@@ -2145,35 +2150,35 @@
           <a:p>
             <a:pPr lvl="0"/>
             <a:r>
-              <a:rPr lang="en-US" altLang="zh-TW" smtClean="0"/>
+              <a:rPr lang="en-US" altLang="zh-TW"/>
               <a:t>Edit Master text styles</a:t>
             </a:r>
           </a:p>
           <a:p>
             <a:pPr lvl="1"/>
             <a:r>
-              <a:rPr lang="en-US" altLang="zh-TW" smtClean="0"/>
+              <a:rPr lang="en-US" altLang="zh-TW"/>
               <a:t>Second level</a:t>
             </a:r>
           </a:p>
           <a:p>
             <a:pPr lvl="2"/>
             <a:r>
-              <a:rPr lang="en-US" altLang="zh-TW" smtClean="0"/>
+              <a:rPr lang="en-US" altLang="zh-TW"/>
               <a:t>Third level</a:t>
             </a:r>
           </a:p>
           <a:p>
             <a:pPr lvl="3"/>
             <a:r>
-              <a:rPr lang="en-US" altLang="zh-TW" smtClean="0"/>
+              <a:rPr lang="en-US" altLang="zh-TW"/>
               <a:t>Fourth level</a:t>
             </a:r>
           </a:p>
           <a:p>
             <a:pPr lvl="4"/>
             <a:r>
-              <a:rPr lang="en-US" altLang="zh-TW" smtClean="0"/>
+              <a:rPr lang="en-US" altLang="zh-TW"/>
               <a:t>Fifth level</a:t>
             </a:r>
             <a:endParaRPr lang="zh-TW" altLang="en-US"/>
@@ -2239,7 +2244,7 @@
           <a:p>
             <a:pPr lvl="0"/>
             <a:r>
-              <a:rPr lang="en-US" altLang="zh-TW" smtClean="0"/>
+              <a:rPr lang="en-US" altLang="zh-TW"/>
               <a:t>Edit Master text styles</a:t>
             </a:r>
           </a:p>
@@ -2262,7 +2267,7 @@
           <a:p>
             <a:fld id="{3A5FA674-15FC-4E67-BCEB-E4B9CC40C07A}" type="datetimeFigureOut">
               <a:rPr lang="vi-VN" smtClean="0"/>
-              <a:t>19/11/2022</a:t>
+              <a:t>14/09/2024</a:t>
             </a:fld>
             <a:endParaRPr lang="vi-VN"/>
           </a:p>
@@ -2365,7 +2370,7 @@
           </a:lstStyle>
           <a:p>
             <a:r>
-              <a:rPr lang="en-US" altLang="zh-TW" smtClean="0"/>
+              <a:rPr lang="en-US" altLang="zh-TW"/>
               <a:t>Click to edit Master title style</a:t>
             </a:r>
             <a:endParaRPr lang="zh-TW" altLang="en-US"/>
@@ -2430,7 +2435,7 @@
           </a:lstStyle>
           <a:p>
             <a:r>
-              <a:rPr lang="en-US" altLang="zh-TW" smtClean="0"/>
+              <a:rPr lang="en-US" altLang="zh-TW"/>
               <a:t>Click icon to add picture</a:t>
             </a:r>
             <a:endParaRPr lang="zh-TW" altLang="en-US"/>
@@ -2496,7 +2501,7 @@
           <a:p>
             <a:pPr lvl="0"/>
             <a:r>
-              <a:rPr lang="en-US" altLang="zh-TW" smtClean="0"/>
+              <a:rPr lang="en-US" altLang="zh-TW"/>
               <a:t>Edit Master text styles</a:t>
             </a:r>
           </a:p>
@@ -2519,7 +2524,7 @@
           <a:p>
             <a:fld id="{3A5FA674-15FC-4E67-BCEB-E4B9CC40C07A}" type="datetimeFigureOut">
               <a:rPr lang="vi-VN" smtClean="0"/>
-              <a:t>19/11/2022</a:t>
+              <a:t>14/09/2024</a:t>
             </a:fld>
             <a:endParaRPr lang="vi-VN"/>
           </a:p>
@@ -2633,10 +2638,9 @@
           <a:lstStyle/>
           <a:p>
             <a:r>
-              <a:rPr lang="zh-TW" altLang="en-US" smtClean="0"/>
+              <a:rPr lang="zh-TW" altLang="en-US"/>
               <a:t>按一下以編輯母片標題樣式</a:t>
             </a:r>
-            <a:endParaRPr lang="zh-TW" altLang="en-US"/>
           </a:p>
         </p:txBody>
       </p:sp>
@@ -2667,38 +2671,37 @@
           <a:p>
             <a:pPr lvl="0"/>
             <a:r>
-              <a:rPr lang="zh-TW" altLang="en-US" smtClean="0"/>
+              <a:rPr lang="zh-TW" altLang="en-US"/>
               <a:t>按一下以編輯母片文字樣式</a:t>
             </a:r>
           </a:p>
           <a:p>
             <a:pPr lvl="1"/>
             <a:r>
-              <a:rPr lang="zh-TW" altLang="en-US" smtClean="0"/>
+              <a:rPr lang="zh-TW" altLang="en-US"/>
               <a:t>第二層</a:t>
             </a:r>
           </a:p>
           <a:p>
             <a:pPr lvl="2"/>
             <a:r>
-              <a:rPr lang="zh-TW" altLang="en-US" smtClean="0"/>
+              <a:rPr lang="zh-TW" altLang="en-US"/>
               <a:t>第三層</a:t>
             </a:r>
           </a:p>
           <a:p>
             <a:pPr lvl="3"/>
             <a:r>
-              <a:rPr lang="zh-TW" altLang="en-US" smtClean="0"/>
+              <a:rPr lang="zh-TW" altLang="en-US"/>
               <a:t>第四層</a:t>
             </a:r>
           </a:p>
           <a:p>
             <a:pPr lvl="4"/>
             <a:r>
-              <a:rPr lang="zh-TW" altLang="en-US" smtClean="0"/>
+              <a:rPr lang="zh-TW" altLang="en-US"/>
               <a:t>第五層</a:t>
             </a:r>
-            <a:endParaRPr lang="zh-TW" altLang="en-US"/>
           </a:p>
         </p:txBody>
       </p:sp>
@@ -2737,7 +2740,7 @@
           <a:p>
             <a:fld id="{3A5FA674-15FC-4E67-BCEB-E4B9CC40C07A}" type="datetimeFigureOut">
               <a:rPr lang="vi-VN" smtClean="0"/>
-              <a:t>19/11/2022</a:t>
+              <a:t>14/09/2024</a:t>
             </a:fld>
             <a:endParaRPr lang="vi-VN"/>
           </a:p>
@@ -3151,6 +3154,37 @@
               </a:rPr>
               <a:t>陪我走過春夏秋冬</a:t>
             </a:r>
+            <a:r>
+              <a:rPr lang="zh-CN" altLang="en-US" sz="7200" b="1" i="1" dirty="0">
+                <a:solidFill>
+                  <a:srgbClr val="000066"/>
+                </a:solidFill>
+                <a:effectLst>
+                  <a:outerShdw blurRad="38100" dist="38100" dir="2700000" algn="tl">
+                    <a:srgbClr val="000000">
+                      <a:alpha val="43137"/>
+                    </a:srgbClr>
+                  </a:outerShdw>
+                </a:effectLst>
+                <a:latin typeface="微軟正黑體" pitchFamily="34" charset="-120"/>
+                <a:ea typeface="微軟正黑體" pitchFamily="34" charset="-120"/>
+              </a:rPr>
+              <a:t>（粵語）</a:t>
+            </a:r>
+            <a:endParaRPr lang="zh-TW" altLang="en-US" sz="7200" b="1" i="1" dirty="0">
+              <a:solidFill>
+                <a:srgbClr val="000066"/>
+              </a:solidFill>
+              <a:effectLst>
+                <a:outerShdw blurRad="38100" dist="38100" dir="2700000" algn="tl">
+                  <a:srgbClr val="000000">
+                    <a:alpha val="43137"/>
+                  </a:srgbClr>
+                </a:outerShdw>
+              </a:effectLst>
+              <a:latin typeface="微軟正黑體" pitchFamily="34" charset="-120"/>
+              <a:ea typeface="微軟正黑體" pitchFamily="34" charset="-120"/>
+            </a:endParaRPr>
           </a:p>
         </p:txBody>
       </p:sp>
@@ -3210,34 +3244,14 @@
               <a:buNone/>
             </a:pPr>
             <a:r>
-              <a:rPr lang="zh-TW" altLang="en-US" sz="6400" b="1" dirty="0" smtClean="0">
+              <a:rPr lang="zh-TW" altLang="en-US" sz="6400" b="1" dirty="0">
                 <a:solidFill>
                   <a:srgbClr val="000066"/>
                 </a:solidFill>
                 <a:latin typeface="微軟正黑體" pitchFamily="34" charset="-120"/>
                 <a:ea typeface="微軟正黑體" pitchFamily="34" charset="-120"/>
               </a:rPr>
-              <a:t>歷</a:t>
-            </a:r>
-            <a:r>
-              <a:rPr lang="zh-TW" altLang="en-US" sz="6400" b="1" dirty="0">
-                <a:solidFill>
-                  <a:srgbClr val="000066"/>
-                </a:solidFill>
-                <a:latin typeface="微軟正黑體" pitchFamily="34" charset="-120"/>
-                <a:ea typeface="微軟正黑體" pitchFamily="34" charset="-120"/>
-              </a:rPr>
-              <a:t>經風浪人生</a:t>
-            </a:r>
-            <a:r>
-              <a:rPr lang="zh-TW" altLang="en-US" sz="6400" b="1" dirty="0">
-                <a:solidFill>
-                  <a:srgbClr val="000066"/>
-                </a:solidFill>
-                <a:latin typeface="微軟正黑體" pitchFamily="34" charset="-120"/>
-                <a:ea typeface="微軟正黑體" pitchFamily="34" charset="-120"/>
-              </a:rPr>
-              <a:t>中</a:t>
+              <a:t>歷經風浪人生中</a:t>
             </a:r>
             <a:endParaRPr lang="en-US" altLang="zh-TW" sz="6400" b="1" dirty="0">
               <a:solidFill>
@@ -3259,57 +3273,27 @@
                 <a:latin typeface="微軟正黑體" pitchFamily="34" charset="-120"/>
                 <a:ea typeface="微軟正黑體" pitchFamily="34" charset="-120"/>
               </a:rPr>
-              <a:t>更</a:t>
-            </a:r>
-            <a:r>
-              <a:rPr lang="zh-TW" altLang="en-US" sz="6400" b="1" dirty="0">
+              <a:t>更清楚</a:t>
+            </a:r>
+            <a:r>
+              <a:rPr lang="zh-CN" altLang="en-US" sz="6400" b="1" dirty="0">
                 <a:solidFill>
                   <a:srgbClr val="000066"/>
                 </a:solidFill>
                 <a:latin typeface="微軟正黑體" pitchFamily="34" charset="-120"/>
                 <a:ea typeface="微軟正黑體" pitchFamily="34" charset="-120"/>
               </a:rPr>
-              <a:t>清</a:t>
-            </a:r>
-            <a:r>
-              <a:rPr lang="zh-TW" altLang="en-US" sz="6400" b="1" dirty="0" smtClean="0">
+              <a:t>祢</a:t>
+            </a:r>
+            <a:r>
+              <a:rPr lang="zh-TW" altLang="en-US" sz="6400" b="1" dirty="0">
                 <a:solidFill>
                   <a:srgbClr val="000066"/>
                 </a:solidFill>
                 <a:latin typeface="微軟正黑體" pitchFamily="34" charset="-120"/>
                 <a:ea typeface="微軟正黑體" pitchFamily="34" charset="-120"/>
               </a:rPr>
-              <a:t>楚</a:t>
-            </a:r>
-            <a:r>
-              <a:rPr lang="zh-CN" altLang="en-US" sz="6400" b="1" dirty="0" smtClean="0">
-                <a:solidFill>
-                  <a:srgbClr val="000066"/>
-                </a:solidFill>
-                <a:latin typeface="微軟正黑體" pitchFamily="34" charset="-120"/>
-                <a:ea typeface="微軟正黑體" pitchFamily="34" charset="-120"/>
-              </a:rPr>
-              <a:t>袮</a:t>
-            </a:r>
-            <a:r>
-              <a:rPr lang="zh-TW" altLang="en-US" sz="6400" b="1" dirty="0" smtClean="0">
-                <a:solidFill>
-                  <a:srgbClr val="000066"/>
-                </a:solidFill>
-                <a:latin typeface="微軟正黑體" pitchFamily="34" charset="-120"/>
-                <a:ea typeface="微軟正黑體" pitchFamily="34" charset="-120"/>
-              </a:rPr>
-              <a:t>在</a:t>
-            </a:r>
-            <a:r>
-              <a:rPr lang="zh-TW" altLang="en-US" sz="6400" b="1" dirty="0">
-                <a:solidFill>
-                  <a:srgbClr val="000066"/>
-                </a:solidFill>
-                <a:latin typeface="微軟正黑體" pitchFamily="34" charset="-120"/>
-                <a:ea typeface="微軟正黑體" pitchFamily="34" charset="-120"/>
-              </a:rPr>
-              <a:t>保守</a:t>
+              <a:t>在保守</a:t>
             </a:r>
             <a:endParaRPr lang="en-US" altLang="zh-TW" sz="6400" b="1" dirty="0">
               <a:solidFill>
@@ -3330,7 +3314,7 @@
         <p:spPr>
           <a:xfrm>
             <a:off x="0" y="5157192"/>
-            <a:ext cx="12192000" cy="748988"/>
+            <a:ext cx="12192000" cy="646331"/>
           </a:xfrm>
           <a:prstGeom prst="rect">
             <a:avLst/>
@@ -3345,7 +3329,7 @@
           <a:p>
             <a:pPr algn="ctr"/>
             <a:r>
-              <a:rPr lang="en-US" sz="4267" b="1" dirty="0">
+              <a:rPr lang="en-US" sz="3600" b="1" dirty="0">
                 <a:solidFill>
                   <a:srgbClr val="000066"/>
                 </a:solidFill>
@@ -3355,17 +3339,17 @@
               <a:t>( </a:t>
             </a:r>
             <a:r>
-              <a:rPr lang="zh-CN" altLang="en-US" sz="4267" b="1" dirty="0">
+              <a:rPr lang="zh-CN" altLang="en-US" sz="3600" b="1" dirty="0">
                 <a:solidFill>
                   <a:srgbClr val="000066"/>
                 </a:solidFill>
                 <a:latin typeface="Microsoft JhengHei" panose="020B0604030504040204" pitchFamily="34" charset="-120"/>
                 <a:ea typeface="Microsoft JhengHei" panose="020B0604030504040204" pitchFamily="34" charset="-120"/>
               </a:rPr>
-              <a:t>正</a:t>
-            </a:r>
-            <a:r>
-              <a:rPr lang="en-US" sz="4267" b="1" dirty="0">
+              <a:t>正歌</a:t>
+            </a:r>
+            <a:r>
+              <a:rPr lang="en-US" sz="3600" b="1" dirty="0">
                 <a:solidFill>
                   <a:srgbClr val="000066"/>
                 </a:solidFill>
@@ -3374,7 +3358,7 @@
               </a:rPr>
               <a:t> )</a:t>
             </a:r>
-            <a:endParaRPr lang="vi-VN" sz="4267" b="1" dirty="0">
+            <a:endParaRPr lang="vi-VN" sz="3600" b="1" dirty="0">
               <a:solidFill>
                 <a:srgbClr val="000066"/>
               </a:solidFill>
@@ -3446,17 +3430,7 @@
                 <a:latin typeface="微軟正黑體" pitchFamily="34" charset="-120"/>
                 <a:ea typeface="微軟正黑體" pitchFamily="34" charset="-120"/>
               </a:rPr>
-              <a:t>在過去和</a:t>
-            </a:r>
-            <a:r>
-              <a:rPr lang="zh-TW" altLang="en-US" sz="6400" b="1" dirty="0">
-                <a:solidFill>
-                  <a:srgbClr val="000066"/>
-                </a:solidFill>
-                <a:latin typeface="微軟正黑體" pitchFamily="34" charset="-120"/>
-                <a:ea typeface="微軟正黑體" pitchFamily="34" charset="-120"/>
-              </a:rPr>
-              <a:t>永遠</a:t>
+              <a:t>在過去和永遠</a:t>
             </a:r>
             <a:endParaRPr lang="en-US" altLang="zh-TW" sz="6400" b="1" dirty="0">
               <a:solidFill>
@@ -3478,57 +3452,27 @@
                 <a:latin typeface="微軟正黑體" pitchFamily="34" charset="-120"/>
                 <a:ea typeface="微軟正黑體" pitchFamily="34" charset="-120"/>
               </a:rPr>
-              <a:t>仍</a:t>
-            </a:r>
-            <a:r>
-              <a:rPr lang="zh-TW" altLang="en-US" sz="6400" b="1" dirty="0">
+              <a:t>仍是信靠</a:t>
+            </a:r>
+            <a:r>
+              <a:rPr lang="zh-CN" altLang="en-US" sz="6400" b="1" dirty="0">
                 <a:solidFill>
                   <a:srgbClr val="000066"/>
                 </a:solidFill>
                 <a:latin typeface="微軟正黑體" pitchFamily="34" charset="-120"/>
                 <a:ea typeface="微軟正黑體" pitchFamily="34" charset="-120"/>
               </a:rPr>
-              <a:t>是信</a:t>
-            </a:r>
-            <a:r>
-              <a:rPr lang="zh-TW" altLang="en-US" sz="6400" b="1" dirty="0" smtClean="0">
+              <a:t>祢</a:t>
+            </a:r>
+            <a:r>
+              <a:rPr lang="zh-TW" altLang="en-US" sz="6400" b="1" dirty="0">
                 <a:solidFill>
                   <a:srgbClr val="000066"/>
                 </a:solidFill>
                 <a:latin typeface="微軟正黑體" pitchFamily="34" charset="-120"/>
                 <a:ea typeface="微軟正黑體" pitchFamily="34" charset="-120"/>
               </a:rPr>
-              <a:t>靠</a:t>
-            </a:r>
-            <a:r>
-              <a:rPr lang="zh-CN" altLang="en-US" sz="6400" b="1" dirty="0">
-                <a:solidFill>
-                  <a:srgbClr val="000066"/>
-                </a:solidFill>
-                <a:latin typeface="微軟正黑體" pitchFamily="34" charset="-120"/>
-                <a:ea typeface="微軟正黑體" pitchFamily="34" charset="-120"/>
-              </a:rPr>
-              <a:t>袮</a:t>
-            </a:r>
-            <a:r>
-              <a:rPr lang="zh-TW" altLang="en-US" sz="6400" b="1" dirty="0" smtClean="0">
-                <a:solidFill>
-                  <a:srgbClr val="000066"/>
-                </a:solidFill>
-                <a:latin typeface="微軟正黑體" pitchFamily="34" charset="-120"/>
-                <a:ea typeface="微軟正黑體" pitchFamily="34" charset="-120"/>
-              </a:rPr>
-              <a:t>恩</a:t>
-            </a:r>
-            <a:r>
-              <a:rPr lang="zh-TW" altLang="en-US" sz="6400" b="1" dirty="0">
-                <a:solidFill>
-                  <a:srgbClr val="000066"/>
-                </a:solidFill>
-                <a:latin typeface="微軟正黑體" pitchFamily="34" charset="-120"/>
-                <a:ea typeface="微軟正黑體" pitchFamily="34" charset="-120"/>
-              </a:rPr>
-              <a:t>手</a:t>
+              <a:t>恩手</a:t>
             </a:r>
             <a:endParaRPr lang="en-US" altLang="zh-TW" sz="6400" b="1" dirty="0">
               <a:solidFill>
@@ -3549,7 +3493,7 @@
         <p:spPr>
           <a:xfrm>
             <a:off x="0" y="5157192"/>
-            <a:ext cx="12192000" cy="748988"/>
+            <a:ext cx="12192000" cy="646331"/>
           </a:xfrm>
           <a:prstGeom prst="rect">
             <a:avLst/>
@@ -3564,7 +3508,7 @@
           <a:p>
             <a:pPr algn="ctr"/>
             <a:r>
-              <a:rPr lang="en-US" sz="4267" b="1" dirty="0">
+              <a:rPr lang="en-US" sz="3600" b="1" dirty="0">
                 <a:solidFill>
                   <a:srgbClr val="000066"/>
                 </a:solidFill>
@@ -3574,26 +3518,26 @@
               <a:t>( </a:t>
             </a:r>
             <a:r>
-              <a:rPr lang="zh-CN" altLang="en-US" sz="4267" b="1" dirty="0">
+              <a:rPr lang="zh-CN" altLang="en-US" sz="3600" b="1" dirty="0">
                 <a:solidFill>
                   <a:srgbClr val="000066"/>
                 </a:solidFill>
                 <a:latin typeface="Microsoft JhengHei" panose="020B0604030504040204" pitchFamily="34" charset="-120"/>
                 <a:ea typeface="Microsoft JhengHei" panose="020B0604030504040204" pitchFamily="34" charset="-120"/>
               </a:rPr>
-              <a:t>正</a:t>
-            </a:r>
-            <a:r>
-              <a:rPr lang="en-US" sz="4267" b="1" dirty="0">
+              <a:t>正歌 </a:t>
+            </a:r>
+            <a:r>
+              <a:rPr lang="en-US" sz="3600" b="1" dirty="0">
                 <a:solidFill>
                   <a:srgbClr val="000066"/>
                 </a:solidFill>
                 <a:latin typeface="Microsoft JhengHei" panose="020B0604030504040204" pitchFamily="34" charset="-120"/>
                 <a:ea typeface="Microsoft JhengHei" panose="020B0604030504040204" pitchFamily="34" charset="-120"/>
               </a:rPr>
-              <a:t> )</a:t>
-            </a:r>
-            <a:endParaRPr lang="vi-VN" sz="4267" b="1" dirty="0">
+              <a:t>)</a:t>
+            </a:r>
+            <a:endParaRPr lang="vi-VN" sz="3600" b="1" dirty="0">
               <a:solidFill>
                 <a:srgbClr val="000066"/>
               </a:solidFill>
@@ -3665,59 +3609,7 @@
                 <a:latin typeface="微軟正黑體" pitchFamily="34" charset="-120"/>
                 <a:ea typeface="微軟正黑體" pitchFamily="34" charset="-120"/>
               </a:rPr>
-              <a:t>度過歲月成長</a:t>
-            </a:r>
-            <a:r>
-              <a:rPr lang="zh-TW" altLang="en-US" sz="6400" b="1" dirty="0" smtClean="0">
-                <a:solidFill>
-                  <a:srgbClr val="000066"/>
-                </a:solidFill>
-                <a:latin typeface="微軟正黑體" pitchFamily="34" charset="-120"/>
-                <a:ea typeface="微軟正黑體" pitchFamily="34" charset="-120"/>
-              </a:rPr>
-              <a:t>中</a:t>
-            </a:r>
-            <a:endParaRPr lang="en-US" altLang="zh-TW" sz="6400" b="1" dirty="0" smtClean="0">
-              <a:solidFill>
-                <a:srgbClr val="000066"/>
-              </a:solidFill>
-              <a:latin typeface="微軟正黑體" pitchFamily="34" charset="-120"/>
-              <a:ea typeface="微軟正黑體" pitchFamily="34" charset="-120"/>
-            </a:endParaRPr>
-          </a:p>
-          <a:p>
-            <a:pPr algn="ctr">
-              <a:buNone/>
-            </a:pPr>
-            <a:r>
-              <a:rPr lang="zh-TW" altLang="en-US" sz="6400" b="1" dirty="0" smtClean="0">
-                <a:solidFill>
-                  <a:srgbClr val="000066"/>
-                </a:solidFill>
-                <a:latin typeface="微軟正黑體" pitchFamily="34" charset="-120"/>
-                <a:ea typeface="微軟正黑體" pitchFamily="34" charset="-120"/>
-              </a:rPr>
-              <a:t>更</a:t>
-            </a:r>
-            <a:r>
-              <a:rPr lang="zh-TW" altLang="en-US" sz="6400" b="1" dirty="0">
-                <a:solidFill>
-                  <a:srgbClr val="000066"/>
-                </a:solidFill>
-                <a:latin typeface="微軟正黑體" pitchFamily="34" charset="-120"/>
-                <a:ea typeface="微軟正黑體" pitchFamily="34" charset="-120"/>
-              </a:rPr>
-              <a:t>加深切慕恩</a:t>
-            </a:r>
-            <a:r>
-              <a:rPr lang="zh-TW" altLang="en-US" sz="6400" b="1" dirty="0" smtClean="0">
-                <a:solidFill>
-                  <a:srgbClr val="000066"/>
-                </a:solidFill>
-                <a:latin typeface="微軟正黑體" pitchFamily="34" charset="-120"/>
-                <a:ea typeface="微軟正黑體" pitchFamily="34" charset="-120"/>
-              </a:rPr>
-              <a:t>主</a:t>
+              <a:t>度過歲月成長中</a:t>
             </a:r>
             <a:endParaRPr lang="en-US" altLang="zh-TW" sz="6400" b="1" dirty="0">
               <a:solidFill>
@@ -3727,6 +3619,28 @@
               <a:ea typeface="微軟正黑體" pitchFamily="34" charset="-120"/>
             </a:endParaRPr>
           </a:p>
+          <a:p>
+            <a:pPr algn="ctr">
+              <a:buNone/>
+            </a:pPr>
+            <a:r>
+              <a:rPr lang="zh-TW" altLang="en-US" sz="6400" b="1" dirty="0">
+                <a:solidFill>
+                  <a:srgbClr val="000066"/>
+                </a:solidFill>
+                <a:latin typeface="微軟正黑體" pitchFamily="34" charset="-120"/>
+                <a:ea typeface="微軟正黑體" pitchFamily="34" charset="-120"/>
+              </a:rPr>
+              <a:t>更加深切慕恩主</a:t>
+            </a:r>
+            <a:endParaRPr lang="en-US" altLang="zh-TW" sz="6400" b="1" dirty="0">
+              <a:solidFill>
+                <a:srgbClr val="000066"/>
+              </a:solidFill>
+              <a:latin typeface="微軟正黑體" pitchFamily="34" charset="-120"/>
+              <a:ea typeface="微軟正黑體" pitchFamily="34" charset="-120"/>
+            </a:endParaRPr>
+          </a:p>
         </p:txBody>
       </p:sp>
       <p:sp>
@@ -3738,7 +3652,7 @@
         <p:spPr>
           <a:xfrm>
             <a:off x="0" y="5157192"/>
-            <a:ext cx="12192000" cy="748988"/>
+            <a:ext cx="12192000" cy="646331"/>
           </a:xfrm>
           <a:prstGeom prst="rect">
             <a:avLst/>
@@ -3753,7 +3667,7 @@
           <a:p>
             <a:pPr algn="ctr"/>
             <a:r>
-              <a:rPr lang="en-US" sz="4267" b="1" dirty="0">
+              <a:rPr lang="en-US" sz="3600" b="1" dirty="0">
                 <a:solidFill>
                   <a:srgbClr val="000066"/>
                 </a:solidFill>
@@ -3763,26 +3677,26 @@
               <a:t>( </a:t>
             </a:r>
             <a:r>
-              <a:rPr lang="zh-CN" altLang="en-US" sz="4267" b="1" dirty="0">
+              <a:rPr lang="zh-CN" altLang="en-US" sz="3600" b="1" dirty="0">
                 <a:solidFill>
                   <a:srgbClr val="000066"/>
                 </a:solidFill>
                 <a:latin typeface="Microsoft JhengHei" panose="020B0604030504040204" pitchFamily="34" charset="-120"/>
                 <a:ea typeface="Microsoft JhengHei" panose="020B0604030504040204" pitchFamily="34" charset="-120"/>
               </a:rPr>
-              <a:t>正</a:t>
-            </a:r>
-            <a:r>
-              <a:rPr lang="en-US" sz="4267" b="1" dirty="0">
+              <a:t>正歌 </a:t>
+            </a:r>
+            <a:r>
+              <a:rPr lang="en-US" sz="3600" b="1" dirty="0">
                 <a:solidFill>
                   <a:srgbClr val="000066"/>
                 </a:solidFill>
                 <a:latin typeface="Microsoft JhengHei" panose="020B0604030504040204" pitchFamily="34" charset="-120"/>
                 <a:ea typeface="Microsoft JhengHei" panose="020B0604030504040204" pitchFamily="34" charset="-120"/>
               </a:rPr>
-              <a:t> )</a:t>
-            </a:r>
-            <a:endParaRPr lang="vi-VN" sz="4267" b="1" dirty="0">
+              <a:t>)</a:t>
+            </a:r>
+            <a:endParaRPr lang="vi-VN" sz="3600" b="1" dirty="0">
               <a:solidFill>
                 <a:srgbClr val="000066"/>
               </a:solidFill>
@@ -3847,7 +3761,7 @@
               <a:buNone/>
             </a:pPr>
             <a:r>
-              <a:rPr lang="zh-TW" altLang="en-US" sz="6400" b="1" dirty="0" smtClean="0">
+              <a:rPr lang="zh-TW" altLang="en-US" sz="6400" b="1" dirty="0">
                 <a:solidFill>
                   <a:srgbClr val="000066"/>
                 </a:solidFill>
@@ -3864,69 +3778,17 @@
                 <a:latin typeface="微軟正黑體" pitchFamily="34" charset="-120"/>
                 <a:ea typeface="微軟正黑體" pitchFamily="34" charset="-120"/>
               </a:rPr>
-              <a:t>袮</a:t>
-            </a:r>
-            <a:r>
-              <a:rPr lang="zh-TW" altLang="en-US" sz="6400" b="1" dirty="0" smtClean="0">
+              <a:t>祢</a:t>
+            </a:r>
+            <a:r>
+              <a:rPr lang="zh-TW" altLang="en-US" sz="6400" b="1" dirty="0">
                 <a:solidFill>
                   <a:srgbClr val="000066"/>
                 </a:solidFill>
                 <a:latin typeface="微軟正黑體" pitchFamily="34" charset="-120"/>
                 <a:ea typeface="微軟正黑體" pitchFamily="34" charset="-120"/>
               </a:rPr>
-              <a:t>慰</a:t>
-            </a:r>
-            <a:r>
-              <a:rPr lang="zh-TW" altLang="en-US" sz="6400" b="1" dirty="0">
-                <a:solidFill>
-                  <a:srgbClr val="000066"/>
-                </a:solidFill>
-                <a:latin typeface="微軟正黑體" pitchFamily="34" charset="-120"/>
-                <a:ea typeface="微軟正黑體" pitchFamily="34" charset="-120"/>
-              </a:rPr>
-              <a:t>藉憐憫</a:t>
-            </a:r>
-            <a:r>
-              <a:rPr lang="zh-TW" altLang="en-US" sz="6400" b="1" dirty="0" smtClean="0">
-                <a:solidFill>
-                  <a:srgbClr val="000066"/>
-                </a:solidFill>
-                <a:latin typeface="微軟正黑體" pitchFamily="34" charset="-120"/>
-                <a:ea typeface="微軟正黑體" pitchFamily="34" charset="-120"/>
-              </a:rPr>
-              <a:t>我</a:t>
-            </a:r>
-            <a:endParaRPr lang="en-US" altLang="zh-TW" sz="6400" b="1" dirty="0" smtClean="0">
-              <a:solidFill>
-                <a:srgbClr val="000066"/>
-              </a:solidFill>
-              <a:latin typeface="微軟正黑體" pitchFamily="34" charset="-120"/>
-              <a:ea typeface="微軟正黑體" pitchFamily="34" charset="-120"/>
-            </a:endParaRPr>
-          </a:p>
-          <a:p>
-            <a:pPr algn="ctr">
-              <a:buNone/>
-            </a:pPr>
-            <a:r>
-              <a:rPr lang="zh-TW" altLang="en-US" sz="6400" b="1" dirty="0" smtClean="0">
-                <a:solidFill>
-                  <a:srgbClr val="000066"/>
-                </a:solidFill>
-                <a:latin typeface="微軟正黑體" pitchFamily="34" charset="-120"/>
-                <a:ea typeface="微軟正黑體" pitchFamily="34" charset="-120"/>
-              </a:rPr>
-              <a:t>主</a:t>
-            </a:r>
-            <a:r>
-              <a:rPr lang="zh-TW" altLang="en-US" sz="6400" b="1" dirty="0">
-                <a:solidFill>
-                  <a:srgbClr val="000066"/>
-                </a:solidFill>
-                <a:latin typeface="微軟正黑體" pitchFamily="34" charset="-120"/>
-                <a:ea typeface="微軟正黑體" pitchFamily="34" charset="-120"/>
-              </a:rPr>
-              <a:t>耶穌</a:t>
+              <a:t>慰藉憐憫我</a:t>
             </a:r>
             <a:endParaRPr lang="en-US" altLang="zh-TW" sz="6400" b="1" dirty="0">
               <a:solidFill>
@@ -3936,6 +3798,28 @@
               <a:ea typeface="微軟正黑體" pitchFamily="34" charset="-120"/>
             </a:endParaRPr>
           </a:p>
+          <a:p>
+            <a:pPr algn="ctr">
+              <a:buNone/>
+            </a:pPr>
+            <a:r>
+              <a:rPr lang="zh-TW" altLang="en-US" sz="6400" b="1" dirty="0">
+                <a:solidFill>
+                  <a:srgbClr val="000066"/>
+                </a:solidFill>
+                <a:latin typeface="微軟正黑體" pitchFamily="34" charset="-120"/>
+                <a:ea typeface="微軟正黑體" pitchFamily="34" charset="-120"/>
+              </a:rPr>
+              <a:t>主耶穌</a:t>
+            </a:r>
+            <a:endParaRPr lang="en-US" altLang="zh-TW" sz="6400" b="1" dirty="0">
+              <a:solidFill>
+                <a:srgbClr val="000066"/>
+              </a:solidFill>
+              <a:latin typeface="微軟正黑體" pitchFamily="34" charset="-120"/>
+              <a:ea typeface="微軟正黑體" pitchFamily="34" charset="-120"/>
+            </a:endParaRPr>
+          </a:p>
         </p:txBody>
       </p:sp>
       <p:sp>
@@ -3947,7 +3831,7 @@
         <p:spPr>
           <a:xfrm>
             <a:off x="0" y="5157192"/>
-            <a:ext cx="12192000" cy="748988"/>
+            <a:ext cx="12192000" cy="646331"/>
           </a:xfrm>
           <a:prstGeom prst="rect">
             <a:avLst/>
@@ -3962,7 +3846,7 @@
           <a:p>
             <a:pPr algn="ctr"/>
             <a:r>
-              <a:rPr lang="en-US" sz="4267" b="1" dirty="0">
+              <a:rPr lang="en-US" sz="3600" b="1" dirty="0">
                 <a:solidFill>
                   <a:srgbClr val="000066"/>
                 </a:solidFill>
@@ -3972,26 +3856,26 @@
               <a:t>( </a:t>
             </a:r>
             <a:r>
-              <a:rPr lang="zh-CN" altLang="en-US" sz="4267" b="1" dirty="0">
+              <a:rPr lang="zh-CN" altLang="en-US" sz="3600" b="1" dirty="0">
                 <a:solidFill>
                   <a:srgbClr val="000066"/>
                 </a:solidFill>
                 <a:latin typeface="Microsoft JhengHei" panose="020B0604030504040204" pitchFamily="34" charset="-120"/>
                 <a:ea typeface="Microsoft JhengHei" panose="020B0604030504040204" pitchFamily="34" charset="-120"/>
               </a:rPr>
-              <a:t>正</a:t>
-            </a:r>
-            <a:r>
-              <a:rPr lang="en-US" sz="4267" b="1" dirty="0">
+              <a:t>正歌 </a:t>
+            </a:r>
+            <a:r>
+              <a:rPr lang="en-US" sz="3600" b="1" dirty="0">
                 <a:solidFill>
                   <a:srgbClr val="000066"/>
                 </a:solidFill>
                 <a:latin typeface="Microsoft JhengHei" panose="020B0604030504040204" pitchFamily="34" charset="-120"/>
                 <a:ea typeface="Microsoft JhengHei" panose="020B0604030504040204" pitchFamily="34" charset="-120"/>
               </a:rPr>
-              <a:t> )</a:t>
-            </a:r>
-            <a:endParaRPr lang="vi-VN" sz="4267" b="1" dirty="0">
+              <a:t>)</a:t>
+            </a:r>
+            <a:endParaRPr lang="vi-VN" sz="3600" b="1" dirty="0">
               <a:solidFill>
                 <a:srgbClr val="000066"/>
               </a:solidFill>
@@ -4063,37 +3947,17 @@
                 <a:latin typeface="微軟正黑體" pitchFamily="34" charset="-120"/>
                 <a:ea typeface="微軟正黑體" pitchFamily="34" charset="-120"/>
               </a:rPr>
-              <a:t>袮</a:t>
-            </a:r>
-            <a:r>
-              <a:rPr lang="zh-TW" altLang="en-US" sz="6400" b="1" dirty="0" smtClean="0">
+              <a:t>祢</a:t>
+            </a:r>
+            <a:r>
+              <a:rPr lang="zh-TW" altLang="en-US" sz="6400" b="1" dirty="0">
                 <a:solidFill>
                   <a:srgbClr val="000066"/>
                 </a:solidFill>
                 <a:latin typeface="微軟正黑體" pitchFamily="34" charset="-120"/>
                 <a:ea typeface="微軟正黑體" pitchFamily="34" charset="-120"/>
               </a:rPr>
-              <a:t>說</a:t>
-            </a:r>
-            <a:r>
-              <a:rPr lang="zh-TW" altLang="en-US" sz="6400" b="1" dirty="0">
-                <a:solidFill>
-                  <a:srgbClr val="000066"/>
-                </a:solidFill>
-                <a:latin typeface="微軟正黑體" pitchFamily="34" charset="-120"/>
-                <a:ea typeface="微軟正黑體" pitchFamily="34" charset="-120"/>
-              </a:rPr>
-              <a:t>始終會伴我秋冬春與</a:t>
-            </a:r>
-            <a:r>
-              <a:rPr lang="zh-TW" altLang="en-US" sz="6400" b="1" dirty="0">
-                <a:solidFill>
-                  <a:srgbClr val="000066"/>
-                </a:solidFill>
-                <a:latin typeface="微軟正黑體" pitchFamily="34" charset="-120"/>
-                <a:ea typeface="微軟正黑體" pitchFamily="34" charset="-120"/>
-              </a:rPr>
-              <a:t>夏</a:t>
+              <a:t>說始終會伴我秋冬春與夏</a:t>
             </a:r>
             <a:endParaRPr lang="en-US" altLang="zh-TW" sz="6400" b="1" dirty="0">
               <a:solidFill>
@@ -4115,37 +3979,7 @@
                 <a:latin typeface="微軟正黑體" pitchFamily="34" charset="-120"/>
                 <a:ea typeface="微軟正黑體" pitchFamily="34" charset="-120"/>
               </a:rPr>
-              <a:t>疼我  保</a:t>
-            </a:r>
-            <a:r>
-              <a:rPr lang="zh-TW" altLang="en-US" sz="6400" b="1" dirty="0">
-                <a:solidFill>
-                  <a:srgbClr val="000066"/>
-                </a:solidFill>
-                <a:latin typeface="微軟正黑體" pitchFamily="34" charset="-120"/>
-                <a:ea typeface="微軟正黑體" pitchFamily="34" charset="-120"/>
-              </a:rPr>
-              <a:t>守</a:t>
-            </a:r>
-            <a:r>
-              <a:rPr lang="zh-TW" altLang="en-US" sz="6400" b="1" dirty="0">
-                <a:solidFill>
-                  <a:srgbClr val="000066"/>
-                </a:solidFill>
-                <a:latin typeface="微軟正黑體" pitchFamily="34" charset="-120"/>
-                <a:ea typeface="微軟正黑體" pitchFamily="34" charset="-120"/>
-              </a:rPr>
-              <a:t>我  引</a:t>
-            </a:r>
-            <a:r>
-              <a:rPr lang="zh-TW" altLang="en-US" sz="6400" b="1" dirty="0">
-                <a:solidFill>
-                  <a:srgbClr val="000066"/>
-                </a:solidFill>
-                <a:latin typeface="微軟正黑體" pitchFamily="34" charset="-120"/>
-                <a:ea typeface="微軟正黑體" pitchFamily="34" charset="-120"/>
-              </a:rPr>
-              <a:t>導一生</a:t>
+              <a:t>疼我  保守我  引導一生</a:t>
             </a:r>
             <a:endParaRPr lang="en-US" altLang="zh-TW" sz="6400" b="1" dirty="0">
               <a:solidFill>
@@ -4166,7 +4000,7 @@
         <p:spPr>
           <a:xfrm>
             <a:off x="0" y="5157192"/>
-            <a:ext cx="12192000" cy="748988"/>
+            <a:ext cx="12192000" cy="646331"/>
           </a:xfrm>
           <a:prstGeom prst="rect">
             <a:avLst/>
@@ -4181,7 +4015,7 @@
           <a:p>
             <a:pPr algn="ctr"/>
             <a:r>
-              <a:rPr lang="en-US" sz="4267" b="1" dirty="0">
+              <a:rPr lang="en-US" sz="3600" b="1" dirty="0">
                 <a:solidFill>
                   <a:srgbClr val="000066"/>
                 </a:solidFill>
@@ -4191,26 +4025,26 @@
               <a:t>( </a:t>
             </a:r>
             <a:r>
-              <a:rPr lang="zh-CN" altLang="en-US" sz="4267" b="1" dirty="0">
+              <a:rPr lang="zh-CN" altLang="en-US" sz="3600" b="1" dirty="0">
                 <a:solidFill>
                   <a:srgbClr val="000066"/>
                 </a:solidFill>
                 <a:latin typeface="Microsoft JhengHei" panose="020B0604030504040204" pitchFamily="34" charset="-120"/>
                 <a:ea typeface="Microsoft JhengHei" panose="020B0604030504040204" pitchFamily="34" charset="-120"/>
               </a:rPr>
-              <a:t>副</a:t>
-            </a:r>
-            <a:r>
-              <a:rPr lang="en-US" sz="4267" b="1" dirty="0">
+              <a:t>副歌 </a:t>
+            </a:r>
+            <a:r>
+              <a:rPr lang="en-US" sz="3600" b="1" dirty="0">
                 <a:solidFill>
                   <a:srgbClr val="000066"/>
                 </a:solidFill>
                 <a:latin typeface="Microsoft JhengHei" panose="020B0604030504040204" pitchFamily="34" charset="-120"/>
                 <a:ea typeface="Microsoft JhengHei" panose="020B0604030504040204" pitchFamily="34" charset="-120"/>
               </a:rPr>
-              <a:t> )</a:t>
-            </a:r>
-            <a:endParaRPr lang="vi-VN" sz="4267" b="1" dirty="0">
+              <a:t>)</a:t>
+            </a:r>
+            <a:endParaRPr lang="vi-VN" sz="3600" b="1" dirty="0">
               <a:solidFill>
                 <a:srgbClr val="000066"/>
               </a:solidFill>
@@ -4282,17 +4116,7 @@
                 <a:latin typeface="微軟正黑體" pitchFamily="34" charset="-120"/>
                 <a:ea typeface="微軟正黑體" pitchFamily="34" charset="-120"/>
               </a:rPr>
-              <a:t>信靠恩主哪懼怕經多少變</a:t>
-            </a:r>
-            <a:r>
-              <a:rPr lang="zh-TW" altLang="en-US" sz="6400" b="1" dirty="0">
-                <a:solidFill>
-                  <a:srgbClr val="000066"/>
-                </a:solidFill>
-                <a:latin typeface="微軟正黑體" pitchFamily="34" charset="-120"/>
-                <a:ea typeface="微軟正黑體" pitchFamily="34" charset="-120"/>
-              </a:rPr>
-              <a:t>幻</a:t>
+              <a:t>信靠恩主哪懼怕經多少變幻</a:t>
             </a:r>
             <a:endParaRPr lang="en-US" altLang="zh-TW" sz="6400" b="1" dirty="0">
               <a:solidFill>
@@ -4314,37 +4138,7 @@
                 <a:latin typeface="微軟正黑體" pitchFamily="34" charset="-120"/>
                 <a:ea typeface="微軟正黑體" pitchFamily="34" charset="-120"/>
               </a:rPr>
-              <a:t>信</a:t>
-            </a:r>
-            <a:r>
-              <a:rPr lang="zh-TW" altLang="en-US" sz="6400" b="1" dirty="0">
-                <a:solidFill>
-                  <a:srgbClr val="000066"/>
-                </a:solidFill>
-                <a:latin typeface="微軟正黑體" pitchFamily="34" charset="-120"/>
-                <a:ea typeface="微軟正黑體" pitchFamily="34" charset="-120"/>
-              </a:rPr>
-              <a:t>靠主我神 </a:t>
-            </a:r>
-            <a:r>
-              <a:rPr lang="zh-TW" altLang="en-US" sz="6400" b="1" dirty="0">
-                <a:solidFill>
-                  <a:srgbClr val="000066"/>
-                </a:solidFill>
-                <a:latin typeface="微軟正黑體" pitchFamily="34" charset="-120"/>
-                <a:ea typeface="微軟正黑體" pitchFamily="34" charset="-120"/>
-              </a:rPr>
-              <a:t> 永</a:t>
-            </a:r>
-            <a:r>
-              <a:rPr lang="zh-TW" altLang="en-US" sz="6400" b="1" dirty="0">
-                <a:solidFill>
-                  <a:srgbClr val="000066"/>
-                </a:solidFill>
-                <a:latin typeface="微軟正黑體" pitchFamily="34" charset="-120"/>
-                <a:ea typeface="微軟正黑體" pitchFamily="34" charset="-120"/>
-              </a:rPr>
-              <a:t>遠被懷抱</a:t>
+              <a:t>信靠主我神  永遠被懷抱</a:t>
             </a:r>
             <a:endParaRPr lang="en-US" altLang="zh-TW" sz="6400" b="1" dirty="0">
               <a:solidFill>
@@ -4365,7 +4159,7 @@
         <p:spPr>
           <a:xfrm>
             <a:off x="0" y="5157192"/>
-            <a:ext cx="12192000" cy="748988"/>
+            <a:ext cx="12192000" cy="646331"/>
           </a:xfrm>
           <a:prstGeom prst="rect">
             <a:avLst/>
@@ -4380,7 +4174,7 @@
           <a:p>
             <a:pPr algn="ctr"/>
             <a:r>
-              <a:rPr lang="en-US" sz="4267" b="1" dirty="0">
+              <a:rPr lang="en-US" sz="3600" b="1" dirty="0">
                 <a:solidFill>
                   <a:srgbClr val="000066"/>
                 </a:solidFill>
@@ -4390,26 +4184,26 @@
               <a:t>( </a:t>
             </a:r>
             <a:r>
-              <a:rPr lang="zh-CN" altLang="en-US" sz="4267" b="1" dirty="0">
+              <a:rPr lang="zh-CN" altLang="en-US" sz="3600" b="1" dirty="0">
                 <a:solidFill>
                   <a:srgbClr val="000066"/>
                 </a:solidFill>
                 <a:latin typeface="Microsoft JhengHei" panose="020B0604030504040204" pitchFamily="34" charset="-120"/>
                 <a:ea typeface="Microsoft JhengHei" panose="020B0604030504040204" pitchFamily="34" charset="-120"/>
               </a:rPr>
-              <a:t>副</a:t>
-            </a:r>
-            <a:r>
-              <a:rPr lang="en-US" sz="4267" b="1" dirty="0">
+              <a:t>副歌 </a:t>
+            </a:r>
+            <a:r>
+              <a:rPr lang="en-US" sz="3600" b="1" dirty="0">
                 <a:solidFill>
                   <a:srgbClr val="000066"/>
                 </a:solidFill>
                 <a:latin typeface="Microsoft JhengHei" panose="020B0604030504040204" pitchFamily="34" charset="-120"/>
                 <a:ea typeface="Microsoft JhengHei" panose="020B0604030504040204" pitchFamily="34" charset="-120"/>
               </a:rPr>
-              <a:t> )</a:t>
-            </a:r>
-            <a:endParaRPr lang="vi-VN" sz="4267" b="1" dirty="0">
+              <a:t>)</a:t>
+            </a:r>
+            <a:endParaRPr lang="vi-VN" sz="3600" b="1" dirty="0">
               <a:solidFill>
                 <a:srgbClr val="000066"/>
               </a:solidFill>
@@ -4481,57 +4275,17 @@
                 <a:latin typeface="微軟正黑體" pitchFamily="34" charset="-120"/>
                 <a:ea typeface="微軟正黑體" pitchFamily="34" charset="-120"/>
               </a:rPr>
-              <a:t>袮</a:t>
-            </a:r>
-            <a:r>
-              <a:rPr lang="zh-TW" altLang="en-US" sz="6400" b="1" dirty="0" smtClean="0">
+              <a:t>祢</a:t>
+            </a:r>
+            <a:r>
+              <a:rPr lang="zh-TW" altLang="en-US" sz="6400" b="1" dirty="0">
                 <a:solidFill>
                   <a:srgbClr val="000066"/>
                 </a:solidFill>
                 <a:latin typeface="微軟正黑體" pitchFamily="34" charset="-120"/>
                 <a:ea typeface="微軟正黑體" pitchFamily="34" charset="-120"/>
               </a:rPr>
-              <a:t>永</a:t>
-            </a:r>
-            <a:r>
-              <a:rPr lang="zh-TW" altLang="en-US" sz="6400" b="1" dirty="0">
-                <a:solidFill>
-                  <a:srgbClr val="000066"/>
-                </a:solidFill>
-                <a:latin typeface="微軟正黑體" pitchFamily="34" charset="-120"/>
-                <a:ea typeface="微軟正黑體" pitchFamily="34" charset="-120"/>
-              </a:rPr>
-              <a:t>不捨棄</a:t>
-            </a:r>
-            <a:r>
-              <a:rPr lang="zh-TW" altLang="en-US" sz="6400" b="1" dirty="0">
-                <a:solidFill>
-                  <a:srgbClr val="000066"/>
-                </a:solidFill>
-                <a:latin typeface="微軟正黑體" pitchFamily="34" charset="-120"/>
-                <a:ea typeface="微軟正黑體" pitchFamily="34" charset="-120"/>
-              </a:rPr>
-              <a:t>我  永</a:t>
-            </a:r>
-            <a:r>
-              <a:rPr lang="zh-TW" altLang="en-US" sz="6400" b="1" dirty="0">
-                <a:solidFill>
-                  <a:srgbClr val="000066"/>
-                </a:solidFill>
-                <a:latin typeface="微軟正黑體" pitchFamily="34" charset="-120"/>
-                <a:ea typeface="微軟正黑體" pitchFamily="34" charset="-120"/>
-              </a:rPr>
-              <a:t>遠與我一</a:t>
-            </a:r>
-            <a:r>
-              <a:rPr lang="zh-TW" altLang="en-US" sz="6400" b="1" dirty="0">
-                <a:solidFill>
-                  <a:srgbClr val="000066"/>
-                </a:solidFill>
-                <a:latin typeface="微軟正黑體" pitchFamily="34" charset="-120"/>
-                <a:ea typeface="微軟正黑體" pitchFamily="34" charset="-120"/>
-              </a:rPr>
-              <a:t>起</a:t>
+              <a:t>永不捨棄我  永遠與我一起</a:t>
             </a:r>
             <a:endParaRPr lang="en-US" altLang="zh-TW" sz="6400" b="1" dirty="0">
               <a:solidFill>
@@ -4553,57 +4307,27 @@
                 <a:latin typeface="微軟正黑體" pitchFamily="34" charset="-120"/>
                 <a:ea typeface="微軟正黑體" pitchFamily="34" charset="-120"/>
               </a:rPr>
-              <a:t>深</a:t>
-            </a:r>
-            <a:r>
-              <a:rPr lang="zh-TW" altLang="en-US" sz="6400" b="1" dirty="0">
+              <a:t>深宵清早</a:t>
+            </a:r>
+            <a:r>
+              <a:rPr lang="zh-CN" altLang="en-US" sz="6400" b="1" dirty="0">
                 <a:solidFill>
                   <a:srgbClr val="000066"/>
                 </a:solidFill>
                 <a:latin typeface="微軟正黑體" pitchFamily="34" charset="-120"/>
                 <a:ea typeface="微軟正黑體" pitchFamily="34" charset="-120"/>
               </a:rPr>
-              <a:t>宵清</a:t>
-            </a:r>
-            <a:r>
-              <a:rPr lang="zh-TW" altLang="en-US" sz="6400" b="1" dirty="0" smtClean="0">
+              <a:t>祢</a:t>
+            </a:r>
+            <a:r>
+              <a:rPr lang="zh-TW" altLang="en-US" sz="6400" b="1" dirty="0">
                 <a:solidFill>
                   <a:srgbClr val="000066"/>
                 </a:solidFill>
                 <a:latin typeface="微軟正黑體" pitchFamily="34" charset="-120"/>
                 <a:ea typeface="微軟正黑體" pitchFamily="34" charset="-120"/>
               </a:rPr>
-              <a:t>早</a:t>
-            </a:r>
-            <a:r>
-              <a:rPr lang="zh-CN" altLang="en-US" sz="6400" b="1" dirty="0">
-                <a:solidFill>
-                  <a:srgbClr val="000066"/>
-                </a:solidFill>
-                <a:latin typeface="微軟正黑體" pitchFamily="34" charset="-120"/>
-                <a:ea typeface="微軟正黑體" pitchFamily="34" charset="-120"/>
-              </a:rPr>
-              <a:t>袮</a:t>
-            </a:r>
-            <a:r>
-              <a:rPr lang="zh-TW" altLang="en-US" sz="6400" b="1" dirty="0" smtClean="0">
-                <a:solidFill>
-                  <a:srgbClr val="000066"/>
-                </a:solidFill>
-                <a:latin typeface="微軟正黑體" pitchFamily="34" charset="-120"/>
-                <a:ea typeface="微軟正黑體" pitchFamily="34" charset="-120"/>
-              </a:rPr>
-              <a:t>亦</a:t>
-            </a:r>
-            <a:r>
-              <a:rPr lang="zh-TW" altLang="en-US" sz="6400" b="1" dirty="0">
-                <a:solidFill>
-                  <a:srgbClr val="000066"/>
-                </a:solidFill>
-                <a:latin typeface="微軟正黑體" pitchFamily="34" charset="-120"/>
-                <a:ea typeface="微軟正黑體" pitchFamily="34" charset="-120"/>
-              </a:rPr>
-              <a:t>陪我過</a:t>
+              <a:t>亦陪我過</a:t>
             </a:r>
             <a:endParaRPr lang="en-US" altLang="zh-TW" sz="6400" b="1" dirty="0">
               <a:solidFill>
@@ -4624,7 +4348,7 @@
         <p:spPr>
           <a:xfrm>
             <a:off x="0" y="5157192"/>
-            <a:ext cx="12192000" cy="748988"/>
+            <a:ext cx="12192000" cy="646331"/>
           </a:xfrm>
           <a:prstGeom prst="rect">
             <a:avLst/>
@@ -4639,7 +4363,7 @@
           <a:p>
             <a:pPr algn="ctr"/>
             <a:r>
-              <a:rPr lang="en-US" sz="4267" b="1" dirty="0">
+              <a:rPr lang="en-US" sz="3600" b="1" dirty="0">
                 <a:solidFill>
                   <a:srgbClr val="000066"/>
                 </a:solidFill>
@@ -4649,7 +4373,7 @@
               <a:t>( </a:t>
             </a:r>
             <a:r>
-              <a:rPr lang="zh-CN" altLang="en-US" sz="4267" b="1" dirty="0">
+              <a:rPr lang="zh-CN" altLang="en-US" sz="3600" b="1" dirty="0">
                 <a:solidFill>
                   <a:srgbClr val="000066"/>
                 </a:solidFill>
@@ -4659,7 +4383,7 @@
               <a:t>橋</a:t>
             </a:r>
             <a:r>
-              <a:rPr lang="en-US" sz="4267" b="1" dirty="0">
+              <a:rPr lang="en-US" sz="3600" b="1" dirty="0">
                 <a:solidFill>
                   <a:srgbClr val="000066"/>
                 </a:solidFill>
@@ -4668,7 +4392,7 @@
               </a:rPr>
               <a:t> )</a:t>
             </a:r>
-            <a:endParaRPr lang="vi-VN" sz="4267" b="1" dirty="0">
+            <a:endParaRPr lang="vi-VN" sz="3600" b="1" dirty="0">
               <a:solidFill>
                 <a:srgbClr val="000066"/>
               </a:solidFill>
@@ -4740,67 +4464,27 @@
                 <a:latin typeface="微軟正黑體" pitchFamily="34" charset="-120"/>
                 <a:ea typeface="微軟正黑體" pitchFamily="34" charset="-120"/>
               </a:rPr>
-              <a:t>過去今天如</a:t>
-            </a:r>
-            <a:r>
-              <a:rPr lang="zh-TW" altLang="en-US" sz="6400" b="1" dirty="0">
+              <a:t>過去今天如何  有</a:t>
+            </a:r>
+            <a:r>
+              <a:rPr lang="zh-CN" altLang="en-US" sz="6400" b="1" dirty="0">
                 <a:solidFill>
                   <a:srgbClr val="000066"/>
                 </a:solidFill>
                 <a:latin typeface="微軟正黑體" pitchFamily="34" charset="-120"/>
                 <a:ea typeface="微軟正黑體" pitchFamily="34" charset="-120"/>
               </a:rPr>
-              <a:t>何  </a:t>
-            </a:r>
-            <a:r>
-              <a:rPr lang="zh-TW" altLang="en-US" sz="6400" b="1" dirty="0" smtClean="0">
+              <a:t>祢</a:t>
+            </a:r>
+            <a:r>
+              <a:rPr lang="zh-TW" altLang="en-US" sz="6400" b="1" dirty="0">
                 <a:solidFill>
                   <a:srgbClr val="000066"/>
                 </a:solidFill>
                 <a:latin typeface="微軟正黑體" pitchFamily="34" charset="-120"/>
                 <a:ea typeface="微軟正黑體" pitchFamily="34" charset="-120"/>
               </a:rPr>
-              <a:t>有</a:t>
-            </a:r>
-            <a:r>
-              <a:rPr lang="zh-CN" altLang="en-US" sz="6400" b="1" dirty="0">
-                <a:solidFill>
-                  <a:srgbClr val="000066"/>
-                </a:solidFill>
-                <a:latin typeface="微軟正黑體" pitchFamily="34" charset="-120"/>
-                <a:ea typeface="微軟正黑體" pitchFamily="34" charset="-120"/>
-              </a:rPr>
-              <a:t>袮</a:t>
-            </a:r>
-            <a:r>
-              <a:rPr lang="zh-TW" altLang="en-US" sz="6400" b="1" dirty="0" smtClean="0">
-                <a:solidFill>
-                  <a:srgbClr val="000066"/>
-                </a:solidFill>
-                <a:latin typeface="微軟正黑體" pitchFamily="34" charset="-120"/>
-                <a:ea typeface="微軟正黑體" pitchFamily="34" charset="-120"/>
-              </a:rPr>
-              <a:t>恩</a:t>
-            </a:r>
-            <a:r>
-              <a:rPr lang="zh-TW" altLang="en-US" sz="6400" b="1" dirty="0">
-                <a:solidFill>
-                  <a:srgbClr val="000066"/>
-                </a:solidFill>
-                <a:latin typeface="微軟正黑體" pitchFamily="34" charset="-120"/>
-                <a:ea typeface="微軟正黑體" pitchFamily="34" charset="-120"/>
-              </a:rPr>
-              <a:t>典加</a:t>
-            </a:r>
-            <a:r>
-              <a:rPr lang="zh-TW" altLang="en-US" sz="6400" b="1" dirty="0">
-                <a:solidFill>
-                  <a:srgbClr val="000066"/>
-                </a:solidFill>
-                <a:latin typeface="微軟正黑體" pitchFamily="34" charset="-120"/>
-                <a:ea typeface="微軟正黑體" pitchFamily="34" charset="-120"/>
-              </a:rPr>
-              <a:t>多</a:t>
+              <a:t>恩典加多</a:t>
             </a:r>
             <a:endParaRPr lang="en-US" altLang="zh-TW" sz="6400" b="1" dirty="0">
               <a:solidFill>
@@ -4822,17 +4506,7 @@
                 <a:latin typeface="微軟正黑體" pitchFamily="34" charset="-120"/>
                 <a:ea typeface="微軟正黑體" pitchFamily="34" charset="-120"/>
               </a:rPr>
-              <a:t>這</a:t>
-            </a:r>
-            <a:r>
-              <a:rPr lang="zh-TW" altLang="en-US" sz="6400" b="1" dirty="0">
-                <a:solidFill>
-                  <a:srgbClr val="000066"/>
-                </a:solidFill>
-                <a:latin typeface="微軟正黑體" pitchFamily="34" charset="-120"/>
-                <a:ea typeface="微軟正黑體" pitchFamily="34" charset="-120"/>
-              </a:rPr>
-              <a:t>一切也靠著神跨過</a:t>
+              <a:t>這一切也靠著神跨過</a:t>
             </a:r>
             <a:endParaRPr lang="en-US" altLang="zh-TW" sz="6400" b="1" dirty="0">
               <a:solidFill>
@@ -4853,7 +4527,7 @@
         <p:spPr>
           <a:xfrm>
             <a:off x="0" y="5157192"/>
-            <a:ext cx="12192000" cy="748988"/>
+            <a:ext cx="12192000" cy="646331"/>
           </a:xfrm>
           <a:prstGeom prst="rect">
             <a:avLst/>
@@ -4868,7 +4542,7 @@
           <a:p>
             <a:pPr algn="ctr"/>
             <a:r>
-              <a:rPr lang="en-US" sz="4267" b="1" dirty="0">
+              <a:rPr lang="en-US" sz="3600" b="1" dirty="0">
                 <a:solidFill>
                   <a:srgbClr val="000066"/>
                 </a:solidFill>
@@ -4878,7 +4552,7 @@
               <a:t>( </a:t>
             </a:r>
             <a:r>
-              <a:rPr lang="zh-CN" altLang="en-US" sz="4267" b="1" dirty="0">
+              <a:rPr lang="zh-CN" altLang="en-US" sz="3600" b="1" dirty="0">
                 <a:solidFill>
                   <a:srgbClr val="000066"/>
                 </a:solidFill>
@@ -4888,7 +4562,7 @@
               <a:t>橋</a:t>
             </a:r>
             <a:r>
-              <a:rPr lang="en-US" sz="4267" b="1" dirty="0">
+              <a:rPr lang="en-US" sz="3600" b="1" dirty="0">
                 <a:solidFill>
                   <a:srgbClr val="000066"/>
                 </a:solidFill>
@@ -4897,7 +4571,7 @@
               </a:rPr>
               <a:t> )</a:t>
             </a:r>
-            <a:endParaRPr lang="vi-VN" sz="4267" b="1" dirty="0">
+            <a:endParaRPr lang="vi-VN" sz="3600" b="1" dirty="0">
               <a:solidFill>
                 <a:srgbClr val="000066"/>
               </a:solidFill>
